--- a/게임제작1_01_3조.pptx
+++ b/게임제작1_01_3조.pptx
@@ -294,7 +294,7 @@
           <a:p>
             <a:fld id="{60EB98FD-1767-41B9-951D-4B3D1F114B66}" type="datetimeFigureOut">
               <a:rPr lang="ko-KR" altLang="en-US" smtClean="0"/>
-              <a:t>2024-10-13</a:t>
+              <a:t>2024-10-15</a:t>
             </a:fld>
             <a:endParaRPr lang="ko-KR" altLang="en-US"/>
           </a:p>
@@ -492,7 +492,7 @@
           <a:p>
             <a:fld id="{60EB98FD-1767-41B9-951D-4B3D1F114B66}" type="datetimeFigureOut">
               <a:rPr lang="ko-KR" altLang="en-US" smtClean="0"/>
-              <a:t>2024-10-13</a:t>
+              <a:t>2024-10-15</a:t>
             </a:fld>
             <a:endParaRPr lang="ko-KR" altLang="en-US"/>
           </a:p>
@@ -700,7 +700,7 @@
           <a:p>
             <a:fld id="{60EB98FD-1767-41B9-951D-4B3D1F114B66}" type="datetimeFigureOut">
               <a:rPr lang="ko-KR" altLang="en-US" smtClean="0"/>
-              <a:t>2024-10-13</a:t>
+              <a:t>2024-10-15</a:t>
             </a:fld>
             <a:endParaRPr lang="ko-KR" altLang="en-US"/>
           </a:p>
@@ -898,7 +898,7 @@
           <a:p>
             <a:fld id="{60EB98FD-1767-41B9-951D-4B3D1F114B66}" type="datetimeFigureOut">
               <a:rPr lang="ko-KR" altLang="en-US" smtClean="0"/>
-              <a:t>2024-10-13</a:t>
+              <a:t>2024-10-15</a:t>
             </a:fld>
             <a:endParaRPr lang="ko-KR" altLang="en-US"/>
           </a:p>
@@ -1173,7 +1173,7 @@
           <a:p>
             <a:fld id="{60EB98FD-1767-41B9-951D-4B3D1F114B66}" type="datetimeFigureOut">
               <a:rPr lang="ko-KR" altLang="en-US" smtClean="0"/>
-              <a:t>2024-10-13</a:t>
+              <a:t>2024-10-15</a:t>
             </a:fld>
             <a:endParaRPr lang="ko-KR" altLang="en-US"/>
           </a:p>
@@ -1438,7 +1438,7 @@
           <a:p>
             <a:fld id="{60EB98FD-1767-41B9-951D-4B3D1F114B66}" type="datetimeFigureOut">
               <a:rPr lang="ko-KR" altLang="en-US" smtClean="0"/>
-              <a:t>2024-10-13</a:t>
+              <a:t>2024-10-15</a:t>
             </a:fld>
             <a:endParaRPr lang="ko-KR" altLang="en-US"/>
           </a:p>
@@ -1850,7 +1850,7 @@
           <a:p>
             <a:fld id="{60EB98FD-1767-41B9-951D-4B3D1F114B66}" type="datetimeFigureOut">
               <a:rPr lang="ko-KR" altLang="en-US" smtClean="0"/>
-              <a:t>2024-10-13</a:t>
+              <a:t>2024-10-15</a:t>
             </a:fld>
             <a:endParaRPr lang="ko-KR" altLang="en-US"/>
           </a:p>
@@ -1991,7 +1991,7 @@
           <a:p>
             <a:fld id="{60EB98FD-1767-41B9-951D-4B3D1F114B66}" type="datetimeFigureOut">
               <a:rPr lang="ko-KR" altLang="en-US" smtClean="0"/>
-              <a:t>2024-10-13</a:t>
+              <a:t>2024-10-15</a:t>
             </a:fld>
             <a:endParaRPr lang="ko-KR" altLang="en-US"/>
           </a:p>
@@ -2104,7 +2104,7 @@
           <a:p>
             <a:fld id="{60EB98FD-1767-41B9-951D-4B3D1F114B66}" type="datetimeFigureOut">
               <a:rPr lang="ko-KR" altLang="en-US" smtClean="0"/>
-              <a:t>2024-10-13</a:t>
+              <a:t>2024-10-15</a:t>
             </a:fld>
             <a:endParaRPr lang="ko-KR" altLang="en-US"/>
           </a:p>
@@ -2415,7 +2415,7 @@
           <a:p>
             <a:fld id="{60EB98FD-1767-41B9-951D-4B3D1F114B66}" type="datetimeFigureOut">
               <a:rPr lang="ko-KR" altLang="en-US" smtClean="0"/>
-              <a:t>2024-10-13</a:t>
+              <a:t>2024-10-15</a:t>
             </a:fld>
             <a:endParaRPr lang="ko-KR" altLang="en-US"/>
           </a:p>
@@ -2703,7 +2703,7 @@
           <a:p>
             <a:fld id="{60EB98FD-1767-41B9-951D-4B3D1F114B66}" type="datetimeFigureOut">
               <a:rPr lang="ko-KR" altLang="en-US" smtClean="0"/>
-              <a:t>2024-10-13</a:t>
+              <a:t>2024-10-15</a:t>
             </a:fld>
             <a:endParaRPr lang="ko-KR" altLang="en-US"/>
           </a:p>
@@ -2944,7 +2944,7 @@
           <a:p>
             <a:fld id="{60EB98FD-1767-41B9-951D-4B3D1F114B66}" type="datetimeFigureOut">
               <a:rPr lang="ko-KR" altLang="en-US" smtClean="0"/>
-              <a:t>2024-10-13</a:t>
+              <a:t>2024-10-15</a:t>
             </a:fld>
             <a:endParaRPr lang="ko-KR" altLang="en-US"/>
           </a:p>
@@ -7756,13 +7756,13 @@
           <p:nvPr>
             <p:extLst>
               <p:ext uri="{D42A27DB-BD31-4B8C-83A1-F6EECF244321}">
-                <p14:modId xmlns:p14="http://schemas.microsoft.com/office/powerpoint/2010/main" val="2503635298"/>
+                <p14:modId xmlns:p14="http://schemas.microsoft.com/office/powerpoint/2010/main" val="3255610638"/>
               </p:ext>
             </p:extLst>
           </p:nvPr>
         </p:nvGraphicFramePr>
         <p:xfrm>
-          <a:off x="689739" y="1938662"/>
+          <a:off x="689739" y="2197280"/>
           <a:ext cx="4977951" cy="3893826"/>
         </p:xfrm>
         <a:graphic>
@@ -8517,30 +8517,6 @@
               </a:rPr>
               <a:t>데이터 테이블</a:t>
             </a:r>
-            <a:r>
-              <a:rPr lang="en-US" altLang="ko-KR" sz="4800" dirty="0">
-                <a:solidFill>
-                  <a:schemeClr val="accent2"/>
-                </a:solidFill>
-                <a:latin typeface="타이포_쌍문동 B" panose="02020803020101020101" pitchFamily="18" charset="-127"/>
-                <a:ea typeface="타이포_쌍문동 B" panose="02020803020101020101" pitchFamily="18" charset="-127"/>
-              </a:rPr>
-              <a:t> </a:t>
-            </a:r>
-            <a:r>
-              <a:rPr lang="en-US" altLang="ko-KR" sz="2800" dirty="0">
-                <a:latin typeface="타이포_쌍문동 B" panose="02020803020101020101" pitchFamily="18" charset="-127"/>
-                <a:ea typeface="타이포_쌍문동 B" panose="02020803020101020101" pitchFamily="18" charset="-127"/>
-              </a:rPr>
-              <a:t>: </a:t>
-            </a:r>
-            <a:r>
-              <a:rPr lang="ko-KR" altLang="en-US" sz="2800" dirty="0">
-                <a:latin typeface="타이포_쌍문동 B" panose="02020803020101020101" pitchFamily="18" charset="-127"/>
-                <a:ea typeface="타이포_쌍문동 B" panose="02020803020101020101" pitchFamily="18" charset="-127"/>
-              </a:rPr>
-              <a:t>객체 단위 데이터 테이블</a:t>
-            </a:r>
             <a:endParaRPr lang="ko-KR" altLang="en-US" sz="4800" dirty="0">
               <a:latin typeface="타이포_쌍문동 B" panose="02020803020101020101" pitchFamily="18" charset="-127"/>
               <a:ea typeface="타이포_쌍문동 B" panose="02020803020101020101" pitchFamily="18" charset="-127"/>
@@ -8563,14 +8539,14 @@
           <p:nvPr>
             <p:extLst>
               <p:ext uri="{D42A27DB-BD31-4B8C-83A1-F6EECF244321}">
-                <p14:modId xmlns:p14="http://schemas.microsoft.com/office/powerpoint/2010/main" val="4027286290"/>
+                <p14:modId xmlns:p14="http://schemas.microsoft.com/office/powerpoint/2010/main" val="2295206467"/>
               </p:ext>
             </p:extLst>
           </p:nvPr>
         </p:nvGraphicFramePr>
         <p:xfrm>
-          <a:off x="6273747" y="1938662"/>
-          <a:ext cx="5296743" cy="3878510"/>
+          <a:off x="6273747" y="2197280"/>
+          <a:ext cx="5296743" cy="1551404"/>
         </p:xfrm>
         <a:graphic>
           <a:graphicData uri="http://schemas.openxmlformats.org/drawingml/2006/table">
@@ -8760,262 +8736,319 @@
                   </a:ext>
                 </a:extLst>
               </a:tr>
-              <a:tr h="775702">
-                <a:tc>
-                  <a:txBody>
-                    <a:bodyPr/>
-                    <a:lstStyle/>
-                    <a:p>
-                      <a:pPr marL="0" marR="0" lvl="0" indent="0" algn="ctr" defTabSz="914400" rtl="0" eaLnBrk="1" fontAlgn="auto" latinLnBrk="1" hangingPunct="1">
-                        <a:lnSpc>
-                          <a:spcPct val="100000"/>
-                        </a:lnSpc>
-                        <a:spcBef>
-                          <a:spcPts val="0"/>
-                        </a:spcBef>
-                        <a:spcAft>
-                          <a:spcPts val="0"/>
-                        </a:spcAft>
-                        <a:buClrTx/>
-                        <a:buSzTx/>
-                        <a:buFontTx/>
-                        <a:buNone/>
-                        <a:tabLst/>
-                        <a:defRPr/>
-                      </a:pPr>
-                      <a:endParaRPr lang="en-US" altLang="ko-KR" sz="1400" dirty="0">
-                        <a:latin typeface="맑은 고딕 Semilight" panose="020B0502040204020203" pitchFamily="50" charset="-127"/>
-                        <a:ea typeface="맑은 고딕 Semilight" panose="020B0502040204020203" pitchFamily="50" charset="-127"/>
-                        <a:cs typeface="맑은 고딕 Semilight" panose="020B0502040204020203" pitchFamily="50" charset="-127"/>
-                      </a:endParaRPr>
-                    </a:p>
-                  </a:txBody>
-                  <a:tcPr anchor="ctr"/>
-                </a:tc>
-                <a:tc>
-                  <a:txBody>
-                    <a:bodyPr/>
-                    <a:lstStyle/>
-                    <a:p>
-                      <a:pPr marL="0" marR="0" lvl="0" indent="0" algn="ctr" defTabSz="914400" rtl="0" eaLnBrk="1" fontAlgn="auto" latinLnBrk="1" hangingPunct="1">
-                        <a:lnSpc>
-                          <a:spcPct val="100000"/>
-                        </a:lnSpc>
-                        <a:spcBef>
-                          <a:spcPts val="0"/>
-                        </a:spcBef>
-                        <a:spcAft>
-                          <a:spcPts val="0"/>
-                        </a:spcAft>
-                        <a:buClrTx/>
-                        <a:buSzTx/>
-                        <a:buFontTx/>
-                        <a:buNone/>
-                        <a:tabLst/>
-                        <a:defRPr/>
-                      </a:pPr>
-                      <a:endParaRPr lang="en-US" altLang="ko-KR" sz="1400" dirty="0">
-                        <a:latin typeface="맑은 고딕 Semilight" panose="020B0502040204020203" pitchFamily="50" charset="-127"/>
-                        <a:ea typeface="맑은 고딕 Semilight" panose="020B0502040204020203" pitchFamily="50" charset="-127"/>
-                        <a:cs typeface="맑은 고딕 Semilight" panose="020B0502040204020203" pitchFamily="50" charset="-127"/>
-                      </a:endParaRPr>
-                    </a:p>
-                  </a:txBody>
-                  <a:tcPr anchor="ctr"/>
-                </a:tc>
-                <a:tc>
-                  <a:txBody>
-                    <a:bodyPr/>
-                    <a:lstStyle/>
-                    <a:p>
-                      <a:pPr algn="ctr" latinLnBrk="1"/>
-                      <a:endParaRPr lang="ko-KR" altLang="en-US" sz="1400" dirty="0">
-                        <a:latin typeface="맑은 고딕 Semilight" panose="020B0502040204020203" pitchFamily="50" charset="-127"/>
-                        <a:ea typeface="맑은 고딕 Semilight" panose="020B0502040204020203" pitchFamily="50" charset="-127"/>
-                        <a:cs typeface="맑은 고딕 Semilight" panose="020B0502040204020203" pitchFamily="50" charset="-127"/>
-                      </a:endParaRPr>
-                    </a:p>
-                  </a:txBody>
-                  <a:tcPr anchor="ctr"/>
-                </a:tc>
-                <a:extLst>
-                  <a:ext uri="{0D108BD9-81ED-4DB2-BD59-A6C34878D82A}">
-                    <a16:rowId xmlns:a16="http://schemas.microsoft.com/office/drawing/2014/main" val="3086344361"/>
-                  </a:ext>
-                </a:extLst>
-              </a:tr>
-              <a:tr h="775702">
-                <a:tc>
-                  <a:txBody>
-                    <a:bodyPr/>
-                    <a:lstStyle/>
-                    <a:p>
-                      <a:pPr marL="0" marR="0" lvl="0" indent="0" algn="ctr" defTabSz="914400" rtl="0" eaLnBrk="1" fontAlgn="auto" latinLnBrk="1" hangingPunct="1">
-                        <a:lnSpc>
-                          <a:spcPct val="100000"/>
-                        </a:lnSpc>
-                        <a:spcBef>
-                          <a:spcPts val="0"/>
-                        </a:spcBef>
-                        <a:spcAft>
-                          <a:spcPts val="0"/>
-                        </a:spcAft>
-                        <a:buClrTx/>
-                        <a:buSzTx/>
-                        <a:buFontTx/>
-                        <a:buNone/>
-                        <a:tabLst/>
-                        <a:defRPr/>
-                      </a:pPr>
-                      <a:endParaRPr lang="en-US" altLang="ko-KR" sz="1400" dirty="0">
-                        <a:latin typeface="맑은 고딕 Semilight" panose="020B0502040204020203" pitchFamily="50" charset="-127"/>
-                        <a:ea typeface="맑은 고딕 Semilight" panose="020B0502040204020203" pitchFamily="50" charset="-127"/>
-                        <a:cs typeface="맑은 고딕 Semilight" panose="020B0502040204020203" pitchFamily="50" charset="-127"/>
-                      </a:endParaRPr>
-                    </a:p>
-                  </a:txBody>
-                  <a:tcPr anchor="ctr"/>
-                </a:tc>
-                <a:tc>
-                  <a:txBody>
-                    <a:bodyPr/>
-                    <a:lstStyle/>
-                    <a:p>
-                      <a:pPr marL="0" marR="0" lvl="0" indent="0" algn="ctr" defTabSz="914400" rtl="0" eaLnBrk="1" fontAlgn="auto" latinLnBrk="1" hangingPunct="1">
-                        <a:lnSpc>
-                          <a:spcPct val="100000"/>
-                        </a:lnSpc>
-                        <a:spcBef>
-                          <a:spcPts val="0"/>
-                        </a:spcBef>
-                        <a:spcAft>
-                          <a:spcPts val="0"/>
-                        </a:spcAft>
-                        <a:buClrTx/>
-                        <a:buSzTx/>
-                        <a:buFontTx/>
-                        <a:buNone/>
-                        <a:tabLst/>
-                        <a:defRPr/>
-                      </a:pPr>
-                      <a:endParaRPr lang="en-US" altLang="ko-KR" sz="1400" dirty="0">
-                        <a:latin typeface="맑은 고딕 Semilight" panose="020B0502040204020203" pitchFamily="50" charset="-127"/>
-                        <a:ea typeface="맑은 고딕 Semilight" panose="020B0502040204020203" pitchFamily="50" charset="-127"/>
-                        <a:cs typeface="맑은 고딕 Semilight" panose="020B0502040204020203" pitchFamily="50" charset="-127"/>
-                      </a:endParaRPr>
-                    </a:p>
-                  </a:txBody>
-                  <a:tcPr anchor="ctr"/>
-                </a:tc>
-                <a:tc>
-                  <a:txBody>
-                    <a:bodyPr/>
-                    <a:lstStyle/>
-                    <a:p>
-                      <a:pPr algn="ctr" latinLnBrk="1"/>
-                      <a:endParaRPr lang="ko-KR" altLang="en-US" sz="1400" dirty="0">
-                        <a:latin typeface="맑은 고딕 Semilight" panose="020B0502040204020203" pitchFamily="50" charset="-127"/>
-                        <a:ea typeface="맑은 고딕 Semilight" panose="020B0502040204020203" pitchFamily="50" charset="-127"/>
-                        <a:cs typeface="맑은 고딕 Semilight" panose="020B0502040204020203" pitchFamily="50" charset="-127"/>
-                      </a:endParaRPr>
-                    </a:p>
-                  </a:txBody>
-                  <a:tcPr anchor="ctr"/>
-                </a:tc>
-                <a:extLst>
-                  <a:ext uri="{0D108BD9-81ED-4DB2-BD59-A6C34878D82A}">
-                    <a16:rowId xmlns:a16="http://schemas.microsoft.com/office/drawing/2014/main" val="2363341230"/>
-                  </a:ext>
-                </a:extLst>
-              </a:tr>
-              <a:tr h="775702">
-                <a:tc>
-                  <a:txBody>
-                    <a:bodyPr/>
-                    <a:lstStyle/>
-                    <a:p>
-                      <a:pPr marL="0" marR="0" lvl="0" indent="0" algn="ctr" defTabSz="914400" rtl="0" eaLnBrk="1" fontAlgn="auto" latinLnBrk="1" hangingPunct="1">
-                        <a:lnSpc>
-                          <a:spcPct val="100000"/>
-                        </a:lnSpc>
-                        <a:spcBef>
-                          <a:spcPts val="0"/>
-                        </a:spcBef>
-                        <a:spcAft>
-                          <a:spcPts val="0"/>
-                        </a:spcAft>
-                        <a:buClrTx/>
-                        <a:buSzTx/>
-                        <a:buFontTx/>
-                        <a:buNone/>
-                        <a:tabLst/>
-                        <a:defRPr/>
-                      </a:pPr>
-                      <a:endParaRPr lang="en-US" altLang="ko-KR" sz="1400" dirty="0">
-                        <a:latin typeface="맑은 고딕 Semilight" panose="020B0502040204020203" pitchFamily="50" charset="-127"/>
-                        <a:ea typeface="맑은 고딕 Semilight" panose="020B0502040204020203" pitchFamily="50" charset="-127"/>
-                        <a:cs typeface="맑은 고딕 Semilight" panose="020B0502040204020203" pitchFamily="50" charset="-127"/>
-                      </a:endParaRPr>
-                    </a:p>
-                  </a:txBody>
-                  <a:tcPr anchor="ctr"/>
-                </a:tc>
-                <a:tc>
-                  <a:txBody>
-                    <a:bodyPr/>
-                    <a:lstStyle/>
-                    <a:p>
-                      <a:pPr marL="0" marR="0" lvl="0" indent="0" algn="ctr" defTabSz="914400" rtl="0" eaLnBrk="1" fontAlgn="auto" latinLnBrk="1" hangingPunct="1">
-                        <a:lnSpc>
-                          <a:spcPct val="100000"/>
-                        </a:lnSpc>
-                        <a:spcBef>
-                          <a:spcPts val="0"/>
-                        </a:spcBef>
-                        <a:spcAft>
-                          <a:spcPts val="0"/>
-                        </a:spcAft>
-                        <a:buClrTx/>
-                        <a:buSzTx/>
-                        <a:buFontTx/>
-                        <a:buNone/>
-                        <a:tabLst/>
-                        <a:defRPr/>
-                      </a:pPr>
-                      <a:endParaRPr lang="en-US" altLang="ko-KR" sz="1400" dirty="0">
-                        <a:latin typeface="맑은 고딕 Semilight" panose="020B0502040204020203" pitchFamily="50" charset="-127"/>
-                        <a:ea typeface="맑은 고딕 Semilight" panose="020B0502040204020203" pitchFamily="50" charset="-127"/>
-                        <a:cs typeface="맑은 고딕 Semilight" panose="020B0502040204020203" pitchFamily="50" charset="-127"/>
-                      </a:endParaRPr>
-                    </a:p>
-                  </a:txBody>
-                  <a:tcPr anchor="ctr"/>
-                </a:tc>
-                <a:tc>
-                  <a:txBody>
-                    <a:bodyPr/>
-                    <a:lstStyle/>
-                    <a:p>
-                      <a:pPr algn="ctr" latinLnBrk="1"/>
-                      <a:endParaRPr lang="ko-KR" altLang="en-US" sz="1400" dirty="0">
-                        <a:latin typeface="맑은 고딕 Semilight" panose="020B0502040204020203" pitchFamily="50" charset="-127"/>
-                        <a:ea typeface="맑은 고딕 Semilight" panose="020B0502040204020203" pitchFamily="50" charset="-127"/>
-                        <a:cs typeface="맑은 고딕 Semilight" panose="020B0502040204020203" pitchFamily="50" charset="-127"/>
-                      </a:endParaRPr>
-                    </a:p>
-                  </a:txBody>
-                  <a:tcPr anchor="ctr"/>
-                </a:tc>
-                <a:extLst>
-                  <a:ext uri="{0D108BD9-81ED-4DB2-BD59-A6C34878D82A}">
-                    <a16:rowId xmlns:a16="http://schemas.microsoft.com/office/drawing/2014/main" val="2467400473"/>
-                  </a:ext>
-                </a:extLst>
-              </a:tr>
             </a:tbl>
           </a:graphicData>
         </a:graphic>
       </p:graphicFrame>
+      <p:sp>
+        <p:nvSpPr>
+          <p:cNvPr id="3" name="TextBox 2">
+            <a:extLst>
+              <a:ext uri="{FF2B5EF4-FFF2-40B4-BE49-F238E27FC236}">
+                <a16:creationId xmlns:a16="http://schemas.microsoft.com/office/drawing/2014/main" id="{0608223B-66D8-A1CA-4ACF-A2778F538BC2}"/>
+              </a:ext>
+            </a:extLst>
+          </p:cNvPr>
+          <p:cNvSpPr txBox="1"/>
+          <p:nvPr/>
+        </p:nvSpPr>
+        <p:spPr>
+          <a:xfrm>
+            <a:off x="689739" y="1556138"/>
+            <a:ext cx="4627418" cy="523220"/>
+          </a:xfrm>
+          <a:prstGeom prst="rect">
+            <a:avLst/>
+          </a:prstGeom>
+          <a:noFill/>
+        </p:spPr>
+        <p:txBody>
+          <a:bodyPr wrap="square" rtlCol="0">
+            <a:spAutoFit/>
+          </a:bodyPr>
+          <a:lstStyle/>
+          <a:p>
+            <a:r>
+              <a:rPr lang="ko-KR" altLang="en-US" sz="2800" dirty="0">
+                <a:latin typeface="타이포_쌍문동 B" panose="02020803020101020101" pitchFamily="18" charset="-127"/>
+                <a:ea typeface="타이포_쌍문동 B" panose="02020803020101020101" pitchFamily="18" charset="-127"/>
+              </a:rPr>
+              <a:t>객체 단위 데이터 테이블</a:t>
+            </a:r>
+            <a:endParaRPr lang="ko-KR" altLang="en-US" sz="2800" dirty="0"/>
+          </a:p>
+        </p:txBody>
+      </p:sp>
+      <p:sp>
+        <p:nvSpPr>
+          <p:cNvPr id="10" name="TextBox 9">
+            <a:extLst>
+              <a:ext uri="{FF2B5EF4-FFF2-40B4-BE49-F238E27FC236}">
+                <a16:creationId xmlns:a16="http://schemas.microsoft.com/office/drawing/2014/main" id="{70961A7A-FE08-26FD-7372-928D0E416FA5}"/>
+              </a:ext>
+            </a:extLst>
+          </p:cNvPr>
+          <p:cNvSpPr txBox="1"/>
+          <p:nvPr/>
+        </p:nvSpPr>
+        <p:spPr>
+          <a:xfrm>
+            <a:off x="6217221" y="1560567"/>
+            <a:ext cx="4627418" cy="523220"/>
+          </a:xfrm>
+          <a:prstGeom prst="rect">
+            <a:avLst/>
+          </a:prstGeom>
+          <a:noFill/>
+        </p:spPr>
+        <p:txBody>
+          <a:bodyPr wrap="square" rtlCol="0">
+            <a:spAutoFit/>
+          </a:bodyPr>
+          <a:lstStyle/>
+          <a:p>
+            <a:r>
+              <a:rPr lang="ko-KR" altLang="en-US" sz="2800" dirty="0">
+                <a:latin typeface="타이포_쌍문동 B" panose="02020803020101020101" pitchFamily="18" charset="-127"/>
+                <a:ea typeface="타이포_쌍문동 B" panose="02020803020101020101" pitchFamily="18" charset="-127"/>
+              </a:rPr>
+              <a:t>전역 데이터 테이블</a:t>
+            </a:r>
+            <a:endParaRPr lang="ko-KR" altLang="en-US" sz="2800" dirty="0"/>
+          </a:p>
+        </p:txBody>
+      </p:sp>
+      <p:sp>
+        <p:nvSpPr>
+          <p:cNvPr id="13" name="TextBox 12">
+            <a:extLst>
+              <a:ext uri="{FF2B5EF4-FFF2-40B4-BE49-F238E27FC236}">
+                <a16:creationId xmlns:a16="http://schemas.microsoft.com/office/drawing/2014/main" id="{B4211D33-44BA-E75C-6303-DE5AFB62B50B}"/>
+              </a:ext>
+            </a:extLst>
+          </p:cNvPr>
+          <p:cNvSpPr txBox="1"/>
+          <p:nvPr/>
+        </p:nvSpPr>
+        <p:spPr>
+          <a:xfrm>
+            <a:off x="6911924" y="4122786"/>
+            <a:ext cx="3836530" cy="954107"/>
+          </a:xfrm>
+          <a:prstGeom prst="rect">
+            <a:avLst/>
+          </a:prstGeom>
+          <a:noFill/>
+        </p:spPr>
+        <p:txBody>
+          <a:bodyPr wrap="square" rtlCol="0">
+            <a:spAutoFit/>
+          </a:bodyPr>
+          <a:lstStyle/>
+          <a:p>
+            <a:pPr algn="ctr"/>
+            <a:r>
+              <a:rPr lang="ko-KR" altLang="en-US" sz="2800" dirty="0">
+                <a:latin typeface="타이포_쌍문동 B" panose="02020803020101020101" pitchFamily="18" charset="-127"/>
+                <a:ea typeface="타이포_쌍문동 B" panose="02020803020101020101" pitchFamily="18" charset="-127"/>
+              </a:rPr>
+              <a:t>문어가 </a:t>
+            </a:r>
+            <a:r>
+              <a:rPr lang="ko-KR" altLang="en-US" sz="2800" dirty="0">
+                <a:solidFill>
+                  <a:schemeClr val="accent2"/>
+                </a:solidFill>
+                <a:latin typeface="타이포_쌍문동 B" panose="02020803020101020101" pitchFamily="18" charset="-127"/>
+                <a:ea typeface="타이포_쌍문동 B" panose="02020803020101020101" pitchFamily="18" charset="-127"/>
+              </a:rPr>
+              <a:t>아래</a:t>
+            </a:r>
+            <a:r>
+              <a:rPr lang="ko-KR" altLang="en-US" sz="2800" dirty="0">
+                <a:latin typeface="타이포_쌍문동 B" panose="02020803020101020101" pitchFamily="18" charset="-127"/>
+                <a:ea typeface="타이포_쌍문동 B" panose="02020803020101020101" pitchFamily="18" charset="-127"/>
+              </a:rPr>
+              <a:t>에</a:t>
+            </a:r>
+            <a:endParaRPr lang="en-US" altLang="ko-KR" sz="2800" dirty="0">
+              <a:latin typeface="타이포_쌍문동 B" panose="02020803020101020101" pitchFamily="18" charset="-127"/>
+              <a:ea typeface="타이포_쌍문동 B" panose="02020803020101020101" pitchFamily="18" charset="-127"/>
+            </a:endParaRPr>
+          </a:p>
+          <a:p>
+            <a:pPr algn="ctr"/>
+            <a:r>
+              <a:rPr lang="ko-KR" altLang="en-US" sz="2800" dirty="0">
+                <a:latin typeface="타이포_쌍문동 B" panose="02020803020101020101" pitchFamily="18" charset="-127"/>
+                <a:ea typeface="타이포_쌍문동 B" panose="02020803020101020101" pitchFamily="18" charset="-127"/>
+              </a:rPr>
+              <a:t>있을 때만 </a:t>
+            </a:r>
+            <a:r>
+              <a:rPr lang="ko-KR" altLang="en-US" sz="2800" dirty="0">
+                <a:solidFill>
+                  <a:schemeClr val="accent2"/>
+                </a:solidFill>
+                <a:latin typeface="타이포_쌍문동 B" panose="02020803020101020101" pitchFamily="18" charset="-127"/>
+                <a:ea typeface="타이포_쌍문동 B" panose="02020803020101020101" pitchFamily="18" charset="-127"/>
+              </a:rPr>
+              <a:t>눈</a:t>
+            </a:r>
+            <a:r>
+              <a:rPr lang="ko-KR" altLang="en-US" sz="2800" dirty="0">
+                <a:latin typeface="타이포_쌍문동 B" panose="02020803020101020101" pitchFamily="18" charset="-127"/>
+                <a:ea typeface="타이포_쌍문동 B" panose="02020803020101020101" pitchFamily="18" charset="-127"/>
+              </a:rPr>
+              <a:t>을 뜸</a:t>
+            </a:r>
+            <a:endParaRPr lang="ko-KR" altLang="en-US" sz="2800" dirty="0"/>
+          </a:p>
+        </p:txBody>
+      </p:sp>
+      <p:sp>
+        <p:nvSpPr>
+          <p:cNvPr id="14" name="화살표: 오른쪽 13">
+            <a:extLst>
+              <a:ext uri="{FF2B5EF4-FFF2-40B4-BE49-F238E27FC236}">
+                <a16:creationId xmlns:a16="http://schemas.microsoft.com/office/drawing/2014/main" id="{17124C39-717F-D55B-ABCC-3DBF270F667D}"/>
+              </a:ext>
+            </a:extLst>
+          </p:cNvPr>
+          <p:cNvSpPr/>
+          <p:nvPr/>
+        </p:nvSpPr>
+        <p:spPr>
+          <a:xfrm rot="12032928">
+            <a:off x="5816223" y="4054524"/>
+            <a:ext cx="1210098" cy="523983"/>
+          </a:xfrm>
+          <a:prstGeom prst="rightArrow">
+            <a:avLst/>
+          </a:prstGeom>
+        </p:spPr>
+        <p:style>
+          <a:lnRef idx="0">
+            <a:schemeClr val="accent2"/>
+          </a:lnRef>
+          <a:fillRef idx="3">
+            <a:schemeClr val="accent2"/>
+          </a:fillRef>
+          <a:effectRef idx="3">
+            <a:schemeClr val="accent2"/>
+          </a:effectRef>
+          <a:fontRef idx="minor">
+            <a:schemeClr val="lt1"/>
+          </a:fontRef>
+        </p:style>
+        <p:txBody>
+          <a:bodyPr rtlCol="0" anchor="ctr"/>
+          <a:lstStyle/>
+          <a:p>
+            <a:pPr algn="ctr"/>
+            <a:endParaRPr lang="ko-KR" altLang="en-US"/>
+          </a:p>
+        </p:txBody>
+      </p:sp>
+      <p:sp>
+        <p:nvSpPr>
+          <p:cNvPr id="15" name="TextBox 14">
+            <a:extLst>
+              <a:ext uri="{FF2B5EF4-FFF2-40B4-BE49-F238E27FC236}">
+                <a16:creationId xmlns:a16="http://schemas.microsoft.com/office/drawing/2014/main" id="{8521FD85-ABEA-3D0D-FCC7-5C807360F2D2}"/>
+              </a:ext>
+            </a:extLst>
+          </p:cNvPr>
+          <p:cNvSpPr txBox="1"/>
+          <p:nvPr/>
+        </p:nvSpPr>
+        <p:spPr>
+          <a:xfrm>
+            <a:off x="6765652" y="5148315"/>
+            <a:ext cx="4393820" cy="1077218"/>
+          </a:xfrm>
+          <a:prstGeom prst="rect">
+            <a:avLst/>
+          </a:prstGeom>
+          <a:noFill/>
+        </p:spPr>
+        <p:txBody>
+          <a:bodyPr wrap="square" rtlCol="0">
+            <a:spAutoFit/>
+          </a:bodyPr>
+          <a:lstStyle/>
+          <a:p>
+            <a:pPr algn="ctr"/>
+            <a:r>
+              <a:rPr lang="en-US" altLang="ko-KR" sz="3200" dirty="0">
+                <a:solidFill>
+                  <a:schemeClr val="accent2"/>
+                </a:solidFill>
+                <a:latin typeface="타이포_쌍문동 B" panose="02020803020101020101" pitchFamily="18" charset="-127"/>
+                <a:ea typeface="타이포_쌍문동 B" panose="02020803020101020101" pitchFamily="18" charset="-127"/>
+              </a:rPr>
+              <a:t>= </a:t>
+            </a:r>
+            <a:r>
+              <a:rPr lang="ko-KR" altLang="en-US" sz="3200" dirty="0">
+                <a:solidFill>
+                  <a:schemeClr val="accent2"/>
+                </a:solidFill>
+                <a:latin typeface="타이포_쌍문동 B" panose="02020803020101020101" pitchFamily="18" charset="-127"/>
+                <a:ea typeface="타이포_쌍문동 B" panose="02020803020101020101" pitchFamily="18" charset="-127"/>
+              </a:rPr>
+              <a:t>분석</a:t>
+            </a:r>
+            <a:r>
+              <a:rPr lang="en-US" altLang="ko-KR" sz="3200" dirty="0">
+                <a:solidFill>
+                  <a:schemeClr val="accent2"/>
+                </a:solidFill>
+                <a:latin typeface="타이포_쌍문동 B" panose="02020803020101020101" pitchFamily="18" charset="-127"/>
+                <a:ea typeface="타이포_쌍문동 B" panose="02020803020101020101" pitchFamily="18" charset="-127"/>
+              </a:rPr>
+              <a:t>&amp;</a:t>
+            </a:r>
+            <a:r>
+              <a:rPr lang="ko-KR" altLang="en-US" sz="3200" dirty="0">
+                <a:solidFill>
+                  <a:schemeClr val="accent2"/>
+                </a:solidFill>
+                <a:latin typeface="타이포_쌍문동 B" panose="02020803020101020101" pitchFamily="18" charset="-127"/>
+                <a:ea typeface="타이포_쌍문동 B" panose="02020803020101020101" pitchFamily="18" charset="-127"/>
+              </a:rPr>
+              <a:t>연습을 통해</a:t>
+            </a:r>
+            <a:endParaRPr lang="en-US" altLang="ko-KR" sz="3200" dirty="0">
+              <a:solidFill>
+                <a:schemeClr val="accent2"/>
+              </a:solidFill>
+              <a:latin typeface="타이포_쌍문동 B" panose="02020803020101020101" pitchFamily="18" charset="-127"/>
+              <a:ea typeface="타이포_쌍문동 B" panose="02020803020101020101" pitchFamily="18" charset="-127"/>
+            </a:endParaRPr>
+          </a:p>
+          <a:p>
+            <a:pPr algn="ctr"/>
+            <a:r>
+              <a:rPr lang="ko-KR" altLang="en-US" sz="3200" dirty="0">
+                <a:solidFill>
+                  <a:schemeClr val="accent2"/>
+                </a:solidFill>
+                <a:latin typeface="타이포_쌍문동 B" panose="02020803020101020101" pitchFamily="18" charset="-127"/>
+                <a:ea typeface="타이포_쌍문동 B" panose="02020803020101020101" pitchFamily="18" charset="-127"/>
+              </a:rPr>
+              <a:t>용이하게 클리어 가능</a:t>
+            </a:r>
+            <a:endParaRPr lang="en-US" altLang="ko-KR" sz="3200" dirty="0">
+              <a:solidFill>
+                <a:schemeClr val="accent2"/>
+              </a:solidFill>
+              <a:latin typeface="타이포_쌍문동 B" panose="02020803020101020101" pitchFamily="18" charset="-127"/>
+              <a:ea typeface="타이포_쌍문동 B" panose="02020803020101020101" pitchFamily="18" charset="-127"/>
+            </a:endParaRPr>
+          </a:p>
+        </p:txBody>
+      </p:sp>
     </p:spTree>
     <p:extLst>
       <p:ext uri="{BB962C8B-B14F-4D97-AF65-F5344CB8AC3E}">
@@ -9060,8 +9093,8 @@
         </p:nvSpPr>
         <p:spPr>
           <a:xfrm>
-            <a:off x="3735607" y="2767280"/>
-            <a:ext cx="6576291" cy="1323439"/>
+            <a:off x="2161309" y="2767280"/>
+            <a:ext cx="8409207" cy="1323439"/>
           </a:xfrm>
           <a:prstGeom prst="rect">
             <a:avLst/>
@@ -9082,7 +9115,17 @@
                 <a:latin typeface="타이포_쌍문동 B" panose="02020803020101020101" pitchFamily="18" charset="-127"/>
                 <a:ea typeface="타이포_쌍문동 B" panose="02020803020101020101" pitchFamily="18" charset="-127"/>
               </a:rPr>
-              <a:t>5.</a:t>
+              <a:t>5</a:t>
+            </a:r>
+            <a:r>
+              <a:rPr lang="en-US" altLang="ko-KR" sz="8000">
+                <a:solidFill>
+                  <a:schemeClr val="accent2"/>
+                </a:solidFill>
+                <a:latin typeface="타이포_쌍문동 B" panose="02020803020101020101" pitchFamily="18" charset="-127"/>
+                <a:ea typeface="타이포_쌍문동 B" panose="02020803020101020101" pitchFamily="18" charset="-127"/>
+              </a:rPr>
+              <a:t>.</a:t>
             </a:r>
             <a:r>
               <a:rPr lang="ko-KR" altLang="en-US" sz="8000" dirty="0">
@@ -9092,7 +9135,7 @@
                 <a:latin typeface="타이포_쌍문동 B" panose="02020803020101020101" pitchFamily="18" charset="-127"/>
                 <a:ea typeface="타이포_쌍문동 B" panose="02020803020101020101" pitchFamily="18" charset="-127"/>
               </a:rPr>
-              <a:t> 마무리</a:t>
+              <a:t> 전체적인 방향</a:t>
             </a:r>
           </a:p>
         </p:txBody>
@@ -9451,7 +9494,7 @@
                 <a:latin typeface="타이포_쌍문동 B" panose="02020803020101020101" pitchFamily="18" charset="-127"/>
                 <a:ea typeface="타이포_쌍문동 B" panose="02020803020101020101" pitchFamily="18" charset="-127"/>
               </a:rPr>
-              <a:t>마무리</a:t>
+              <a:t>전체적인 방향</a:t>
             </a:r>
             <a:endParaRPr lang="ko-KR" altLang="en-US" sz="4800" dirty="0">
               <a:latin typeface="타이포_쌍문동 B" panose="02020803020101020101" pitchFamily="18" charset="-127"/>
@@ -11342,8 +11385,8 @@
         </p:nvSpPr>
         <p:spPr>
           <a:xfrm>
-            <a:off x="1859612" y="2293944"/>
-            <a:ext cx="8472776" cy="2554545"/>
+            <a:off x="1859612" y="2767280"/>
+            <a:ext cx="8472776" cy="1323439"/>
           </a:xfrm>
           <a:prstGeom prst="rect">
             <a:avLst/>
@@ -11365,20 +11408,7 @@
                 <a:latin typeface="타이포_쌍문동 B" panose="02020803020101020101" pitchFamily="18" charset="-127"/>
                 <a:ea typeface="타이포_쌍문동 B" panose="02020803020101020101" pitchFamily="18" charset="-127"/>
               </a:rPr>
-              <a:t>Thank you</a:t>
-            </a:r>
-          </a:p>
-          <a:p>
-            <a:pPr algn="ctr"/>
-            <a:r>
-              <a:rPr lang="en-US" altLang="ko-KR" sz="8000" dirty="0">
-                <a:solidFill>
-                  <a:schemeClr val="accent2"/>
-                </a:solidFill>
-                <a:latin typeface="타이포_쌍문동 B" panose="02020803020101020101" pitchFamily="18" charset="-127"/>
-                <a:ea typeface="타이포_쌍문동 B" panose="02020803020101020101" pitchFamily="18" charset="-127"/>
-              </a:rPr>
-              <a:t>for listening!</a:t>
+              <a:t>Thank you!</a:t>
             </a:r>
             <a:endParaRPr lang="ko-KR" altLang="en-US" sz="8000" dirty="0">
               <a:solidFill>
@@ -13862,7 +13892,7 @@
           <p:nvPr>
             <p:extLst>
               <p:ext uri="{D42A27DB-BD31-4B8C-83A1-F6EECF244321}">
-                <p14:modId xmlns:p14="http://schemas.microsoft.com/office/powerpoint/2010/main" val="2149797754"/>
+                <p14:modId xmlns:p14="http://schemas.microsoft.com/office/powerpoint/2010/main" val="998957368"/>
               </p:ext>
             </p:extLst>
           </p:nvPr>
@@ -14410,21 +14440,37 @@
                         </a:rPr>
                         <a:t>몸을 특정 박자에 맞춰</a:t>
                       </a:r>
-                      <a:endParaRPr lang="en-US" altLang="ko-KR" sz="1400" dirty="0">
-                        <a:latin typeface="맑은 고딕 Semilight" panose="020B0502040204020203" pitchFamily="50" charset="-127"/>
-                        <a:ea typeface="맑은 고딕 Semilight" panose="020B0502040204020203" pitchFamily="50" charset="-127"/>
-                        <a:cs typeface="맑은 고딕 Semilight" panose="020B0502040204020203" pitchFamily="50" charset="-127"/>
-                      </a:endParaRPr>
-                    </a:p>
-                    <a:p>
-                      <a:pPr algn="ctr" latinLnBrk="1"/>
+                      <a:r>
+                        <a:rPr lang="en-US" altLang="ko-KR" sz="1400" dirty="0">
+                          <a:latin typeface="맑은 고딕 Semilight" panose="020B0502040204020203" pitchFamily="50" charset="-127"/>
+                          <a:ea typeface="맑은 고딕 Semilight" panose="020B0502040204020203" pitchFamily="50" charset="-127"/>
+                          <a:cs typeface="맑은 고딕 Semilight" panose="020B0502040204020203" pitchFamily="50" charset="-127"/>
+                        </a:rPr>
+                        <a:t> </a:t>
+                      </a:r>
                       <a:r>
                         <a:rPr lang="ko-KR" altLang="en-US" sz="1400" dirty="0">
                           <a:latin typeface="맑은 고딕 Semilight" panose="020B0502040204020203" pitchFamily="50" charset="-127"/>
                           <a:ea typeface="맑은 고딕 Semilight" panose="020B0502040204020203" pitchFamily="50" charset="-127"/>
                           <a:cs typeface="맑은 고딕 Semilight" panose="020B0502040204020203" pitchFamily="50" charset="-127"/>
                         </a:rPr>
-                        <a:t>위아래로 움직임</a:t>
+                        <a:t>상하로 움직여</a:t>
+                      </a:r>
+                      <a:r>
+                        <a:rPr lang="en-US" altLang="ko-KR" sz="1400" dirty="0">
+                          <a:latin typeface="맑은 고딕 Semilight" panose="020B0502040204020203" pitchFamily="50" charset="-127"/>
+                          <a:ea typeface="맑은 고딕 Semilight" panose="020B0502040204020203" pitchFamily="50" charset="-127"/>
+                          <a:cs typeface="맑은 고딕 Semilight" panose="020B0502040204020203" pitchFamily="50" charset="-127"/>
+                        </a:rPr>
+                        <a:t> </a:t>
+                      </a:r>
+                      <a:r>
+                        <a:rPr lang="ko-KR" altLang="en-US" sz="1400" dirty="0">
+                          <a:latin typeface="맑은 고딕 Semilight" panose="020B0502040204020203" pitchFamily="50" charset="-127"/>
+                          <a:ea typeface="맑은 고딕 Semilight" panose="020B0502040204020203" pitchFamily="50" charset="-127"/>
+                          <a:cs typeface="맑은 고딕 Semilight" panose="020B0502040204020203" pitchFamily="50" charset="-127"/>
+                        </a:rPr>
+                        <a:t>눈을 뜨는 타이밍 제시</a:t>
                       </a:r>
                       <a:endParaRPr lang="en-US" altLang="ko-KR" sz="1400" dirty="0">
                         <a:latin typeface="맑은 고딕 Semilight" panose="020B0502040204020203" pitchFamily="50" charset="-127"/>
@@ -14884,12 +14930,12 @@
                         <a:defRPr/>
                       </a:pPr>
                       <a:r>
-                        <a:rPr lang="ko-KR" altLang="en-US" sz="1200" dirty="0">
+                        <a:rPr lang="ko-KR" altLang="en-US" sz="1400" dirty="0">
                           <a:latin typeface="맑은 고딕 Semilight" panose="020B0502040204020203" pitchFamily="50" charset="-127"/>
                           <a:ea typeface="맑은 고딕 Semilight" panose="020B0502040204020203" pitchFamily="50" charset="-127"/>
                           <a:cs typeface="맑은 고딕 Semilight" panose="020B0502040204020203" pitchFamily="50" charset="-127"/>
                         </a:rPr>
-                        <a:t>현재 스테이지</a:t>
+                        <a:t>스테이지</a:t>
                       </a:r>
                       <a:r>
                         <a:rPr lang="en-US" altLang="ko-KR" sz="1400" dirty="0">
@@ -15533,7 +15579,7 @@
           <p:nvPr>
             <p:extLst>
               <p:ext uri="{D42A27DB-BD31-4B8C-83A1-F6EECF244321}">
-                <p14:modId xmlns:p14="http://schemas.microsoft.com/office/powerpoint/2010/main" val="1214430618"/>
+                <p14:modId xmlns:p14="http://schemas.microsoft.com/office/powerpoint/2010/main" val="213746031"/>
               </p:ext>
             </p:extLst>
           </p:nvPr>
@@ -16099,21 +16145,37 @@
                         </a:rPr>
                         <a:t>몸을 특정 박자에 맞춰</a:t>
                       </a:r>
-                      <a:endParaRPr lang="en-US" altLang="ko-KR" sz="1400" dirty="0">
-                        <a:latin typeface="맑은 고딕 Semilight" panose="020B0502040204020203" pitchFamily="50" charset="-127"/>
-                        <a:ea typeface="맑은 고딕 Semilight" panose="020B0502040204020203" pitchFamily="50" charset="-127"/>
-                        <a:cs typeface="맑은 고딕 Semilight" panose="020B0502040204020203" pitchFamily="50" charset="-127"/>
-                      </a:endParaRPr>
-                    </a:p>
-                    <a:p>
-                      <a:pPr algn="ctr" latinLnBrk="1"/>
+                      <a:r>
+                        <a:rPr lang="en-US" altLang="ko-KR" sz="1400" dirty="0">
+                          <a:latin typeface="맑은 고딕 Semilight" panose="020B0502040204020203" pitchFamily="50" charset="-127"/>
+                          <a:ea typeface="맑은 고딕 Semilight" panose="020B0502040204020203" pitchFamily="50" charset="-127"/>
+                          <a:cs typeface="맑은 고딕 Semilight" panose="020B0502040204020203" pitchFamily="50" charset="-127"/>
+                        </a:rPr>
+                        <a:t> </a:t>
+                      </a:r>
                       <a:r>
                         <a:rPr lang="ko-KR" altLang="en-US" sz="1400" dirty="0">
                           <a:latin typeface="맑은 고딕 Semilight" panose="020B0502040204020203" pitchFamily="50" charset="-127"/>
                           <a:ea typeface="맑은 고딕 Semilight" panose="020B0502040204020203" pitchFamily="50" charset="-127"/>
                           <a:cs typeface="맑은 고딕 Semilight" panose="020B0502040204020203" pitchFamily="50" charset="-127"/>
                         </a:rPr>
-                        <a:t>위아래로 움직임</a:t>
+                        <a:t>상하로 움직여</a:t>
+                      </a:r>
+                      <a:r>
+                        <a:rPr lang="en-US" altLang="ko-KR" sz="1400" dirty="0">
+                          <a:latin typeface="맑은 고딕 Semilight" panose="020B0502040204020203" pitchFamily="50" charset="-127"/>
+                          <a:ea typeface="맑은 고딕 Semilight" panose="020B0502040204020203" pitchFamily="50" charset="-127"/>
+                          <a:cs typeface="맑은 고딕 Semilight" panose="020B0502040204020203" pitchFamily="50" charset="-127"/>
+                        </a:rPr>
+                        <a:t> </a:t>
+                      </a:r>
+                      <a:r>
+                        <a:rPr lang="ko-KR" altLang="en-US" sz="1400" dirty="0">
+                          <a:latin typeface="맑은 고딕 Semilight" panose="020B0502040204020203" pitchFamily="50" charset="-127"/>
+                          <a:ea typeface="맑은 고딕 Semilight" panose="020B0502040204020203" pitchFamily="50" charset="-127"/>
+                          <a:cs typeface="맑은 고딕 Semilight" panose="020B0502040204020203" pitchFamily="50" charset="-127"/>
+                        </a:rPr>
+                        <a:t>눈을 뜨는 타이밍 제시</a:t>
                       </a:r>
                       <a:endParaRPr lang="en-US" altLang="ko-KR" sz="1400" dirty="0">
                         <a:latin typeface="맑은 고딕 Semilight" panose="020B0502040204020203" pitchFamily="50" charset="-127"/>
@@ -16585,12 +16647,12 @@
                         <a:defRPr/>
                       </a:pPr>
                       <a:r>
-                        <a:rPr lang="ko-KR" altLang="en-US" sz="1200" dirty="0">
+                        <a:rPr lang="ko-KR" altLang="en-US" sz="1400" dirty="0">
                           <a:latin typeface="맑은 고딕 Semilight" panose="020B0502040204020203" pitchFamily="50" charset="-127"/>
                           <a:ea typeface="맑은 고딕 Semilight" panose="020B0502040204020203" pitchFamily="50" charset="-127"/>
                           <a:cs typeface="맑은 고딕 Semilight" panose="020B0502040204020203" pitchFamily="50" charset="-127"/>
                         </a:rPr>
-                        <a:t>현재 스테이지</a:t>
+                        <a:t>스테이지</a:t>
                       </a:r>
                       <a:r>
                         <a:rPr lang="en-US" altLang="ko-KR" sz="1400" dirty="0">
@@ -16600,11 +16662,6 @@
                         </a:rPr>
                         <a:t>(stage)</a:t>
                       </a:r>
-                      <a:endParaRPr lang="en-US" altLang="ko-KR" sz="1200" dirty="0">
-                        <a:latin typeface="맑은 고딕 Semilight" panose="020B0502040204020203" pitchFamily="50" charset="-127"/>
-                        <a:ea typeface="맑은 고딕 Semilight" panose="020B0502040204020203" pitchFamily="50" charset="-127"/>
-                        <a:cs typeface="맑은 고딕 Semilight" panose="020B0502040204020203" pitchFamily="50" charset="-127"/>
-                      </a:endParaRPr>
                     </a:p>
                   </a:txBody>
                   <a:tcPr anchor="ctr"/>
